--- a/docs/slides/pptx/worldmm_4axis_demo.pptx
+++ b/docs/slides/pptx/worldmm_4axis_demo.pptx
@@ -18,6 +18,14 @@
     <p:sldId id="266" r:id="rId17"/>
     <p:sldId id="267" r:id="rId18"/>
     <p:sldId id="268" r:id="rId19"/>
+    <p:sldId id="269" r:id="rId20"/>
+    <p:sldId id="270" r:id="rId21"/>
+    <p:sldId id="271" r:id="rId22"/>
+    <p:sldId id="272" r:id="rId23"/>
+    <p:sldId id="273" r:id="rId24"/>
+    <p:sldId id="274" r:id="rId25"/>
+    <p:sldId id="275" r:id="rId26"/>
+    <p:sldId id="276" r:id="rId27"/>
   </p:sldIdLst>
   <p:sldSz cx="12191695" cy="6858000" type="screen4x3"/>
   <p:notesSz cx="6858000" cy="9144000"/>
@@ -3300,6 +3308,258 @@
 </p:sld>
 </file>
 
+<file path=ppt/slides/slide14.xml><?xml version="1.0" encoding="utf-8"?>
+<p:sld xmlns:a="http://schemas.openxmlformats.org/drawingml/2006/main" xmlns:p="http://schemas.openxmlformats.org/presentationml/2006/main" xmlns:r="http://schemas.openxmlformats.org/officeDocument/2006/relationships">
+  <p:cSld>
+    <p:spTree>
+      <p:nvGrpSpPr>
+        <p:cNvPr id="1" name=""/>
+        <p:cNvGrpSpPr/>
+        <p:nvPr/>
+      </p:nvGrpSpPr>
+      <p:grpSpPr/>
+      <p:pic>
+        <p:nvPicPr>
+          <p:cNvPr id="2" name="Picture 1" descr="slide_13_worldmm-spatial-case-13.png"/>
+          <p:cNvPicPr>
+            <a:picLocks noChangeAspect="1"/>
+          </p:cNvPicPr>
+          <p:nvPr/>
+        </p:nvPicPr>
+        <p:blipFill>
+          <a:blip r:embed="rId2"/>
+          <a:stretch>
+            <a:fillRect/>
+          </a:stretch>
+        </p:blipFill>
+        <p:spPr>
+          <a:xfrm>
+            <a:off x="0" y="0"/>
+            <a:ext cx="12191695" cy="6858000"/>
+          </a:xfrm>
+          <a:prstGeom prst="rect">
+            <a:avLst/>
+          </a:prstGeom>
+        </p:spPr>
+      </p:pic>
+    </p:spTree>
+  </p:cSld>
+  <p:clrMapOvr>
+    <a:masterClrMapping/>
+  </p:clrMapOvr>
+</p:sld>
+</file>
+
+<file path=ppt/slides/slide15.xml><?xml version="1.0" encoding="utf-8"?>
+<p:sld xmlns:a="http://schemas.openxmlformats.org/drawingml/2006/main" xmlns:p="http://schemas.openxmlformats.org/presentationml/2006/main" xmlns:r="http://schemas.openxmlformats.org/officeDocument/2006/relationships">
+  <p:cSld>
+    <p:spTree>
+      <p:nvGrpSpPr>
+        <p:cNvPr id="1" name=""/>
+        <p:cNvGrpSpPr/>
+        <p:nvPr/>
+      </p:nvGrpSpPr>
+      <p:grpSpPr/>
+      <p:pic>
+        <p:nvPicPr>
+          <p:cNvPr id="2" name="Picture 1" descr="slide_14_worldmm-spatial-case-14.png"/>
+          <p:cNvPicPr>
+            <a:picLocks noChangeAspect="1"/>
+          </p:cNvPicPr>
+          <p:nvPr/>
+        </p:nvPicPr>
+        <p:blipFill>
+          <a:blip r:embed="rId2"/>
+          <a:stretch>
+            <a:fillRect/>
+          </a:stretch>
+        </p:blipFill>
+        <p:spPr>
+          <a:xfrm>
+            <a:off x="0" y="0"/>
+            <a:ext cx="12191695" cy="6858000"/>
+          </a:xfrm>
+          <a:prstGeom prst="rect">
+            <a:avLst/>
+          </a:prstGeom>
+        </p:spPr>
+      </p:pic>
+    </p:spTree>
+  </p:cSld>
+  <p:clrMapOvr>
+    <a:masterClrMapping/>
+  </p:clrMapOvr>
+</p:sld>
+</file>
+
+<file path=ppt/slides/slide16.xml><?xml version="1.0" encoding="utf-8"?>
+<p:sld xmlns:a="http://schemas.openxmlformats.org/drawingml/2006/main" xmlns:p="http://schemas.openxmlformats.org/presentationml/2006/main" xmlns:r="http://schemas.openxmlformats.org/officeDocument/2006/relationships">
+  <p:cSld>
+    <p:spTree>
+      <p:nvGrpSpPr>
+        <p:cNvPr id="1" name=""/>
+        <p:cNvGrpSpPr/>
+        <p:nvPr/>
+      </p:nvGrpSpPr>
+      <p:grpSpPr/>
+      <p:pic>
+        <p:nvPicPr>
+          <p:cNvPr id="2" name="Picture 1" descr="slide_15_worldmm-spatial-case-15.png"/>
+          <p:cNvPicPr>
+            <a:picLocks noChangeAspect="1"/>
+          </p:cNvPicPr>
+          <p:nvPr/>
+        </p:nvPicPr>
+        <p:blipFill>
+          <a:blip r:embed="rId2"/>
+          <a:stretch>
+            <a:fillRect/>
+          </a:stretch>
+        </p:blipFill>
+        <p:spPr>
+          <a:xfrm>
+            <a:off x="0" y="0"/>
+            <a:ext cx="12191695" cy="6858000"/>
+          </a:xfrm>
+          <a:prstGeom prst="rect">
+            <a:avLst/>
+          </a:prstGeom>
+        </p:spPr>
+      </p:pic>
+    </p:spTree>
+  </p:cSld>
+  <p:clrMapOvr>
+    <a:masterClrMapping/>
+  </p:clrMapOvr>
+</p:sld>
+</file>
+
+<file path=ppt/slides/slide17.xml><?xml version="1.0" encoding="utf-8"?>
+<p:sld xmlns:a="http://schemas.openxmlformats.org/drawingml/2006/main" xmlns:p="http://schemas.openxmlformats.org/presentationml/2006/main" xmlns:r="http://schemas.openxmlformats.org/officeDocument/2006/relationships">
+  <p:cSld>
+    <p:spTree>
+      <p:nvGrpSpPr>
+        <p:cNvPr id="1" name=""/>
+        <p:cNvGrpSpPr/>
+        <p:nvPr/>
+      </p:nvGrpSpPr>
+      <p:grpSpPr/>
+      <p:pic>
+        <p:nvPicPr>
+          <p:cNvPr id="2" name="Picture 1" descr="slide_16_worldmm-spatial-case-16.png"/>
+          <p:cNvPicPr>
+            <a:picLocks noChangeAspect="1"/>
+          </p:cNvPicPr>
+          <p:nvPr/>
+        </p:nvPicPr>
+        <p:blipFill>
+          <a:blip r:embed="rId2"/>
+          <a:stretch>
+            <a:fillRect/>
+          </a:stretch>
+        </p:blipFill>
+        <p:spPr>
+          <a:xfrm>
+            <a:off x="0" y="0"/>
+            <a:ext cx="12191695" cy="6858000"/>
+          </a:xfrm>
+          <a:prstGeom prst="rect">
+            <a:avLst/>
+          </a:prstGeom>
+        </p:spPr>
+      </p:pic>
+    </p:spTree>
+  </p:cSld>
+  <p:clrMapOvr>
+    <a:masterClrMapping/>
+  </p:clrMapOvr>
+</p:sld>
+</file>
+
+<file path=ppt/slides/slide18.xml><?xml version="1.0" encoding="utf-8"?>
+<p:sld xmlns:a="http://schemas.openxmlformats.org/drawingml/2006/main" xmlns:p="http://schemas.openxmlformats.org/presentationml/2006/main" xmlns:r="http://schemas.openxmlformats.org/officeDocument/2006/relationships">
+  <p:cSld>
+    <p:spTree>
+      <p:nvGrpSpPr>
+        <p:cNvPr id="1" name=""/>
+        <p:cNvGrpSpPr/>
+        <p:nvPr/>
+      </p:nvGrpSpPr>
+      <p:grpSpPr/>
+      <p:pic>
+        <p:nvPicPr>
+          <p:cNvPr id="2" name="Picture 1" descr="slide_17_worldmm-spatial-case-17.png"/>
+          <p:cNvPicPr>
+            <a:picLocks noChangeAspect="1"/>
+          </p:cNvPicPr>
+          <p:nvPr/>
+        </p:nvPicPr>
+        <p:blipFill>
+          <a:blip r:embed="rId2"/>
+          <a:stretch>
+            <a:fillRect/>
+          </a:stretch>
+        </p:blipFill>
+        <p:spPr>
+          <a:xfrm>
+            <a:off x="0" y="0"/>
+            <a:ext cx="12191695" cy="6858000"/>
+          </a:xfrm>
+          <a:prstGeom prst="rect">
+            <a:avLst/>
+          </a:prstGeom>
+        </p:spPr>
+      </p:pic>
+    </p:spTree>
+  </p:cSld>
+  <p:clrMapOvr>
+    <a:masterClrMapping/>
+  </p:clrMapOvr>
+</p:sld>
+</file>
+
+<file path=ppt/slides/slide19.xml><?xml version="1.0" encoding="utf-8"?>
+<p:sld xmlns:a="http://schemas.openxmlformats.org/drawingml/2006/main" xmlns:p="http://schemas.openxmlformats.org/presentationml/2006/main" xmlns:r="http://schemas.openxmlformats.org/officeDocument/2006/relationships">
+  <p:cSld>
+    <p:spTree>
+      <p:nvGrpSpPr>
+        <p:cNvPr id="1" name=""/>
+        <p:cNvGrpSpPr/>
+        <p:nvPr/>
+      </p:nvGrpSpPr>
+      <p:grpSpPr/>
+      <p:pic>
+        <p:nvPicPr>
+          <p:cNvPr id="2" name="Picture 1" descr="slide_18_worldmm-spatial-case-18.png"/>
+          <p:cNvPicPr>
+            <a:picLocks noChangeAspect="1"/>
+          </p:cNvPicPr>
+          <p:nvPr/>
+        </p:nvPicPr>
+        <p:blipFill>
+          <a:blip r:embed="rId2"/>
+          <a:stretch>
+            <a:fillRect/>
+          </a:stretch>
+        </p:blipFill>
+        <p:spPr>
+          <a:xfrm>
+            <a:off x="0" y="0"/>
+            <a:ext cx="12191695" cy="6858000"/>
+          </a:xfrm>
+          <a:prstGeom prst="rect">
+            <a:avLst/>
+          </a:prstGeom>
+        </p:spPr>
+      </p:pic>
+    </p:spTree>
+  </p:cSld>
+  <p:clrMapOvr>
+    <a:masterClrMapping/>
+  </p:clrMapOvr>
+</p:sld>
+</file>
+
 <file path=ppt/slides/slide2.xml><?xml version="1.0" encoding="utf-8"?>
 <p:sld xmlns:a="http://schemas.openxmlformats.org/drawingml/2006/main" xmlns:p="http://schemas.openxmlformats.org/presentationml/2006/main" xmlns:r="http://schemas.openxmlformats.org/officeDocument/2006/relationships">
   <p:cSld>
@@ -3313,6 +3573,90 @@
       <p:pic>
         <p:nvPicPr>
           <p:cNvPr id="2" name="Picture 1" descr="slide_01_worldmm-spatial-case-01.png"/>
+          <p:cNvPicPr>
+            <a:picLocks noChangeAspect="1"/>
+          </p:cNvPicPr>
+          <p:nvPr/>
+        </p:nvPicPr>
+        <p:blipFill>
+          <a:blip r:embed="rId2"/>
+          <a:stretch>
+            <a:fillRect/>
+          </a:stretch>
+        </p:blipFill>
+        <p:spPr>
+          <a:xfrm>
+            <a:off x="0" y="0"/>
+            <a:ext cx="12191695" cy="6858000"/>
+          </a:xfrm>
+          <a:prstGeom prst="rect">
+            <a:avLst/>
+          </a:prstGeom>
+        </p:spPr>
+      </p:pic>
+    </p:spTree>
+  </p:cSld>
+  <p:clrMapOvr>
+    <a:masterClrMapping/>
+  </p:clrMapOvr>
+</p:sld>
+</file>
+
+<file path=ppt/slides/slide20.xml><?xml version="1.0" encoding="utf-8"?>
+<p:sld xmlns:a="http://schemas.openxmlformats.org/drawingml/2006/main" xmlns:p="http://schemas.openxmlformats.org/presentationml/2006/main" xmlns:r="http://schemas.openxmlformats.org/officeDocument/2006/relationships">
+  <p:cSld>
+    <p:spTree>
+      <p:nvGrpSpPr>
+        <p:cNvPr id="1" name=""/>
+        <p:cNvGrpSpPr/>
+        <p:nvPr/>
+      </p:nvGrpSpPr>
+      <p:grpSpPr/>
+      <p:pic>
+        <p:nvPicPr>
+          <p:cNvPr id="2" name="Picture 1" descr="slide_19_worldmm-spatial-case-19.png"/>
+          <p:cNvPicPr>
+            <a:picLocks noChangeAspect="1"/>
+          </p:cNvPicPr>
+          <p:nvPr/>
+        </p:nvPicPr>
+        <p:blipFill>
+          <a:blip r:embed="rId2"/>
+          <a:stretch>
+            <a:fillRect/>
+          </a:stretch>
+        </p:blipFill>
+        <p:spPr>
+          <a:xfrm>
+            <a:off x="0" y="0"/>
+            <a:ext cx="12191695" cy="6858000"/>
+          </a:xfrm>
+          <a:prstGeom prst="rect">
+            <a:avLst/>
+          </a:prstGeom>
+        </p:spPr>
+      </p:pic>
+    </p:spTree>
+  </p:cSld>
+  <p:clrMapOvr>
+    <a:masterClrMapping/>
+  </p:clrMapOvr>
+</p:sld>
+</file>
+
+<file path=ppt/slides/slide21.xml><?xml version="1.0" encoding="utf-8"?>
+<p:sld xmlns:a="http://schemas.openxmlformats.org/drawingml/2006/main" xmlns:p="http://schemas.openxmlformats.org/presentationml/2006/main" xmlns:r="http://schemas.openxmlformats.org/officeDocument/2006/relationships">
+  <p:cSld>
+    <p:spTree>
+      <p:nvGrpSpPr>
+        <p:cNvPr id="1" name=""/>
+        <p:cNvGrpSpPr/>
+        <p:nvPr/>
+      </p:nvGrpSpPr>
+      <p:grpSpPr/>
+      <p:pic>
+        <p:nvPicPr>
+          <p:cNvPr id="2" name="Picture 1" descr="slide_20_worldmm-spatial-case-20.png"/>
           <p:cNvPicPr>
             <a:picLocks noChangeAspect="1"/>
           </p:cNvPicPr>

--- a/docs/slides/pptx/worldmm_4axis_demo.pptx
+++ b/docs/slides/pptx/worldmm_4axis_demo.pptx
@@ -26,6 +26,8 @@
     <p:sldId id="274" r:id="rId25"/>
     <p:sldId id="275" r:id="rId26"/>
     <p:sldId id="276" r:id="rId27"/>
+    <p:sldId id="277" r:id="rId28"/>
+    <p:sldId id="278" r:id="rId29"/>
   </p:sldIdLst>
   <p:sldSz cx="12191695" cy="6858000" type="screen4x3"/>
   <p:notesSz cx="6858000" cy="9144000"/>
@@ -3152,7 +3154,7 @@
       <p:grpSpPr/>
       <p:pic>
         <p:nvPicPr>
-          <p:cNvPr id="2" name="Picture 1" descr="slide_09_worldmm-spatial-case-09.png"/>
+          <p:cNvPr id="2" name="Picture 1" descr="slide_09_worldmm-spatial-case-08.png"/>
           <p:cNvPicPr>
             <a:picLocks noChangeAspect="1"/>
           </p:cNvPicPr>
@@ -3194,7 +3196,7 @@
       <p:grpSpPr/>
       <p:pic>
         <p:nvPicPr>
-          <p:cNvPr id="2" name="Picture 1" descr="slide_10_worldmm-spatial-case-10.png"/>
+          <p:cNvPr id="2" name="Picture 1" descr="slide_10_worldmm-spatial-case-09.png"/>
           <p:cNvPicPr>
             <a:picLocks noChangeAspect="1"/>
           </p:cNvPicPr>
@@ -3236,7 +3238,7 @@
       <p:grpSpPr/>
       <p:pic>
         <p:nvPicPr>
-          <p:cNvPr id="2" name="Picture 1" descr="slide_11_worldmm-spatial-case-11.png"/>
+          <p:cNvPr id="2" name="Picture 1" descr="slide_11_worldmm-spatial-case-10.png"/>
           <p:cNvPicPr>
             <a:picLocks noChangeAspect="1"/>
           </p:cNvPicPr>
@@ -3278,7 +3280,7 @@
       <p:grpSpPr/>
       <p:pic>
         <p:nvPicPr>
-          <p:cNvPr id="2" name="Picture 1" descr="slide_12_worldmm-spatial-case-12.png"/>
+          <p:cNvPr id="2" name="Picture 1" descr="slide_12_worldmm-spatial-case-11.png"/>
           <p:cNvPicPr>
             <a:picLocks noChangeAspect="1"/>
           </p:cNvPicPr>
@@ -3320,7 +3322,7 @@
       <p:grpSpPr/>
       <p:pic>
         <p:nvPicPr>
-          <p:cNvPr id="2" name="Picture 1" descr="slide_13_worldmm-spatial-case-13.png"/>
+          <p:cNvPr id="2" name="Picture 1" descr="slide_13_worldmm-spatial-case-12.png"/>
           <p:cNvPicPr>
             <a:picLocks noChangeAspect="1"/>
           </p:cNvPicPr>
@@ -3362,7 +3364,7 @@
       <p:grpSpPr/>
       <p:pic>
         <p:nvPicPr>
-          <p:cNvPr id="2" name="Picture 1" descr="slide_14_worldmm-spatial-case-14.png"/>
+          <p:cNvPr id="2" name="Picture 1" descr="slide_14_worldmm-spatial-case-13.png"/>
           <p:cNvPicPr>
             <a:picLocks noChangeAspect="1"/>
           </p:cNvPicPr>
@@ -3404,7 +3406,7 @@
       <p:grpSpPr/>
       <p:pic>
         <p:nvPicPr>
-          <p:cNvPr id="2" name="Picture 1" descr="slide_15_worldmm-spatial-case-15.png"/>
+          <p:cNvPr id="2" name="Picture 1" descr="slide_15_worldmm-spatial-case-14.png"/>
           <p:cNvPicPr>
             <a:picLocks noChangeAspect="1"/>
           </p:cNvPicPr>
@@ -3446,7 +3448,7 @@
       <p:grpSpPr/>
       <p:pic>
         <p:nvPicPr>
-          <p:cNvPr id="2" name="Picture 1" descr="slide_16_worldmm-spatial-case-16.png"/>
+          <p:cNvPr id="2" name="Picture 1" descr="slide_16_worldmm-spatial-case-15.png"/>
           <p:cNvPicPr>
             <a:picLocks noChangeAspect="1"/>
           </p:cNvPicPr>
@@ -3488,7 +3490,7 @@
       <p:grpSpPr/>
       <p:pic>
         <p:nvPicPr>
-          <p:cNvPr id="2" name="Picture 1" descr="slide_17_worldmm-spatial-case-17.png"/>
+          <p:cNvPr id="2" name="Picture 1" descr="slide_17_worldmm-spatial-case-16.png"/>
           <p:cNvPicPr>
             <a:picLocks noChangeAspect="1"/>
           </p:cNvPicPr>
@@ -3530,7 +3532,7 @@
       <p:grpSpPr/>
       <p:pic>
         <p:nvPicPr>
-          <p:cNvPr id="2" name="Picture 1" descr="slide_18_worldmm-spatial-case-18.png"/>
+          <p:cNvPr id="2" name="Picture 1" descr="slide_18_worldmm-spatial-case-17.png"/>
           <p:cNvPicPr>
             <a:picLocks noChangeAspect="1"/>
           </p:cNvPicPr>
@@ -3572,7 +3574,7 @@
       <p:grpSpPr/>
       <p:pic>
         <p:nvPicPr>
-          <p:cNvPr id="2" name="Picture 1" descr="slide_01_worldmm-spatial-case-01.png"/>
+          <p:cNvPr id="2" name="Picture 1" descr="slide_01_worldmm-spatial-distance-case.png"/>
           <p:cNvPicPr>
             <a:picLocks noChangeAspect="1"/>
           </p:cNvPicPr>
@@ -3614,7 +3616,7 @@
       <p:grpSpPr/>
       <p:pic>
         <p:nvPicPr>
-          <p:cNvPr id="2" name="Picture 1" descr="slide_19_worldmm-spatial-case-19.png"/>
+          <p:cNvPr id="2" name="Picture 1" descr="slide_19_worldmm-spatial-case-18.png"/>
           <p:cNvPicPr>
             <a:picLocks noChangeAspect="1"/>
           </p:cNvPicPr>
@@ -3656,7 +3658,91 @@
       <p:grpSpPr/>
       <p:pic>
         <p:nvPicPr>
-          <p:cNvPr id="2" name="Picture 1" descr="slide_20_worldmm-spatial-case-20.png"/>
+          <p:cNvPr id="2" name="Picture 1" descr="slide_20_worldmm-spatial-case-19.png"/>
+          <p:cNvPicPr>
+            <a:picLocks noChangeAspect="1"/>
+          </p:cNvPicPr>
+          <p:nvPr/>
+        </p:nvPicPr>
+        <p:blipFill>
+          <a:blip r:embed="rId2"/>
+          <a:stretch>
+            <a:fillRect/>
+          </a:stretch>
+        </p:blipFill>
+        <p:spPr>
+          <a:xfrm>
+            <a:off x="0" y="0"/>
+            <a:ext cx="12191695" cy="6858000"/>
+          </a:xfrm>
+          <a:prstGeom prst="rect">
+            <a:avLst/>
+          </a:prstGeom>
+        </p:spPr>
+      </p:pic>
+    </p:spTree>
+  </p:cSld>
+  <p:clrMapOvr>
+    <a:masterClrMapping/>
+  </p:clrMapOvr>
+</p:sld>
+</file>
+
+<file path=ppt/slides/slide22.xml><?xml version="1.0" encoding="utf-8"?>
+<p:sld xmlns:a="http://schemas.openxmlformats.org/drawingml/2006/main" xmlns:p="http://schemas.openxmlformats.org/presentationml/2006/main" xmlns:r="http://schemas.openxmlformats.org/officeDocument/2006/relationships">
+  <p:cSld>
+    <p:spTree>
+      <p:nvGrpSpPr>
+        <p:cNvPr id="1" name=""/>
+        <p:cNvGrpSpPr/>
+        <p:nvPr/>
+      </p:nvGrpSpPr>
+      <p:grpSpPr/>
+      <p:pic>
+        <p:nvPicPr>
+          <p:cNvPr id="2" name="Picture 1" descr="slide_21_worldmm-spatial-case-20.png"/>
+          <p:cNvPicPr>
+            <a:picLocks noChangeAspect="1"/>
+          </p:cNvPicPr>
+          <p:nvPr/>
+        </p:nvPicPr>
+        <p:blipFill>
+          <a:blip r:embed="rId2"/>
+          <a:stretch>
+            <a:fillRect/>
+          </a:stretch>
+        </p:blipFill>
+        <p:spPr>
+          <a:xfrm>
+            <a:off x="0" y="0"/>
+            <a:ext cx="12191695" cy="6858000"/>
+          </a:xfrm>
+          <a:prstGeom prst="rect">
+            <a:avLst/>
+          </a:prstGeom>
+        </p:spPr>
+      </p:pic>
+    </p:spTree>
+  </p:cSld>
+  <p:clrMapOvr>
+    <a:masterClrMapping/>
+  </p:clrMapOvr>
+</p:sld>
+</file>
+
+<file path=ppt/slides/slide23.xml><?xml version="1.0" encoding="utf-8"?>
+<p:sld xmlns:a="http://schemas.openxmlformats.org/drawingml/2006/main" xmlns:p="http://schemas.openxmlformats.org/presentationml/2006/main" xmlns:r="http://schemas.openxmlformats.org/officeDocument/2006/relationships">
+  <p:cSld>
+    <p:spTree>
+      <p:nvGrpSpPr>
+        <p:cNvPr id="1" name=""/>
+        <p:cNvGrpSpPr/>
+        <p:nvPr/>
+      </p:nvGrpSpPr>
+      <p:grpSpPr/>
+      <p:pic>
+        <p:nvPicPr>
+          <p:cNvPr id="2" name="Picture 1" descr="slide_22_worldmm-spatial-case-21.png"/>
           <p:cNvPicPr>
             <a:picLocks noChangeAspect="1"/>
           </p:cNvPicPr>
@@ -3698,7 +3784,7 @@
       <p:grpSpPr/>
       <p:pic>
         <p:nvPicPr>
-          <p:cNvPr id="2" name="Picture 1" descr="slide_02_worldmm-spatial-case-02.png"/>
+          <p:cNvPr id="2" name="Picture 1" descr="slide_02_worldmm-spatial-case-01.png"/>
           <p:cNvPicPr>
             <a:picLocks noChangeAspect="1"/>
           </p:cNvPicPr>
@@ -3740,7 +3826,7 @@
       <p:grpSpPr/>
       <p:pic>
         <p:nvPicPr>
-          <p:cNvPr id="2" name="Picture 1" descr="slide_03_worldmm-spatial-case-03.png"/>
+          <p:cNvPr id="2" name="Picture 1" descr="slide_03_worldmm-spatial-case-02.png"/>
           <p:cNvPicPr>
             <a:picLocks noChangeAspect="1"/>
           </p:cNvPicPr>
@@ -3782,7 +3868,7 @@
       <p:grpSpPr/>
       <p:pic>
         <p:nvPicPr>
-          <p:cNvPr id="2" name="Picture 1" descr="slide_04_worldmm-spatial-case-04.png"/>
+          <p:cNvPr id="2" name="Picture 1" descr="slide_04_worldmm-spatial-case-03.png"/>
           <p:cNvPicPr>
             <a:picLocks noChangeAspect="1"/>
           </p:cNvPicPr>
@@ -3824,7 +3910,7 @@
       <p:grpSpPr/>
       <p:pic>
         <p:nvPicPr>
-          <p:cNvPr id="2" name="Picture 1" descr="slide_05_worldmm-spatial-case-05.png"/>
+          <p:cNvPr id="2" name="Picture 1" descr="slide_05_worldmm-spatial-case-04.png"/>
           <p:cNvPicPr>
             <a:picLocks noChangeAspect="1"/>
           </p:cNvPicPr>
@@ -3866,7 +3952,7 @@
       <p:grpSpPr/>
       <p:pic>
         <p:nvPicPr>
-          <p:cNvPr id="2" name="Picture 1" descr="slide_06_worldmm-spatial-case-06.png"/>
+          <p:cNvPr id="2" name="Picture 1" descr="slide_06_worldmm-spatial-case-05.png"/>
           <p:cNvPicPr>
             <a:picLocks noChangeAspect="1"/>
           </p:cNvPicPr>
@@ -3908,7 +3994,7 @@
       <p:grpSpPr/>
       <p:pic>
         <p:nvPicPr>
-          <p:cNvPr id="2" name="Picture 1" descr="slide_07_worldmm-spatial-case-07.png"/>
+          <p:cNvPr id="2" name="Picture 1" descr="slide_07_worldmm-spatial-case-06.png"/>
           <p:cNvPicPr>
             <a:picLocks noChangeAspect="1"/>
           </p:cNvPicPr>
@@ -3950,7 +4036,7 @@
       <p:grpSpPr/>
       <p:pic>
         <p:nvPicPr>
-          <p:cNvPr id="2" name="Picture 1" descr="slide_08_worldmm-spatial-case-08.png"/>
+          <p:cNvPr id="2" name="Picture 1" descr="slide_08_worldmm-spatial-case-07.png"/>
           <p:cNvPicPr>
             <a:picLocks noChangeAspect="1"/>
           </p:cNvPicPr>
